--- a/docs/briefs/oxa.pptx
+++ b/docs/briefs/oxa.pptx
@@ -513,27 +513,27 @@
           </a:p>
           <a:p>
             <a:r>
-              <a:t>- Your Oct 2025 post on multimodal search suggests Foundry already does clip retrieval. Where does Foundry stop today, and where do you hand off to a labelling vendor or tool?</a:t>
-            </a:r>
-          </a:p>
-          <a:p>
-            <a:r>
-              <a:t>- For the Dubai SHIFFT sites, are you planning to relabel from scratch or transfer from the UK datasets, and how will you decide what is genuinely new?</a:t>
-            </a:r>
-          </a:p>
-          <a:p>
-            <a:r>
-              <a:t>- How do you currently label camera and LIDAR together, and how much of the annotator time goes on keeping 2D and 3D consistent across frames?</a:t>
-            </a:r>
-          </a:p>
-          <a:p>
-            <a:r>
-              <a:t>- When a perception regression shows up in shadow running or the safety case, how do you trace it back to a data gap or a label error, and how long does that take?</a:t>
-            </a:r>
-          </a:p>
-          <a:p>
-            <a:r>
-              <a:t>- Who owns the decision on how many frames get labelled per site per month, and what is the current cost per labelled clip or per sensor-hour?</a:t>
+              <a:t>- Your October 2025 post talked about multimodal search speeding up development. What does that cover today, and where does it stop being enough?</a:t>
+            </a:r>
+          </a:p>
+          <a:p>
+            <a:r>
+              <a:t>- When you stand up a new site like Dubai, roughly how many labelled frames do you need before perception is signed off, and how much of that is genuinely new versus a repeat of Heathrow or Tyne?</a:t>
+            </a:r>
+          </a:p>
+          <a:p>
+            <a:r>
+              <a:t>- Are 3D point cloud and camera labelled on the same synced clip today, and who does the 3D work, internal team or vendor?</a:t>
+            </a:r>
+          </a:p>
+          <a:p>
+            <a:r>
+              <a:t>- How do you currently decide which clips from a week of repeated route runs actually get sent for labelling?</a:t>
+            </a:r>
+          </a:p>
+          <a:p>
+            <a:r>
+              <a:t>- What does Oxa Foundry own that you would never outsource, and where would you rather buy than build?</a:t>
             </a:r>
           </a:p>
         </p:txBody>
@@ -613,22 +613,27 @@
           </a:p>
           <a:p>
             <a:r>
-              <a:t>- Strong in-house tooling. Oxa Foundry and their published multimodal search work suggest they may already consider curation and search a solved, internal capability, and they are well funded ($103m Series D first close) to keep building it.</a:t>
-            </a:r>
-          </a:p>
-          <a:p>
-            <a:r>
-              <a:t>- No ML/CV job ads found and no named contact, so we have no direct evidence of a hiring or tooling gap; the pain is inferred from deployment signals only.</a:t>
-            </a:r>
-          </a:p>
-          <a:p>
-            <a:r>
-              <a:t>- Data access and residency. Port, airport and bp customer data may be under contractual restriction, and the Dubai joint venture may impose UAE residency requirements that complicate a GCP-hosted control plane, even though data stays in their bucket.</a:t>
-            </a:r>
-          </a:p>
-          <a:p>
-            <a:r>
-              <a:t>- Incumbent AV toolchain. Automotive-grade competitors (Scale, Segments, Foretellix-style scenario tooling) or an NVIDIA-aligned stack may already be embedded via their NVIDIA partnership.</a:t>
+              <a:t>- Oxa Foundry is an internal toolchain and they have already invested in multimodal search, so this is a build-versus-buy fight, not a greenfield one.</a:t>
+            </a:r>
+          </a:p>
+          <a:p>
+            <a:r>
+              <a:t>- No open ML/CV job ads found and no contact identified, so we have no direct evidence of a hiring or tooling gap. The pain is inferred.</a:t>
+            </a:r>
+          </a:p>
+          <a:p>
+            <a:r>
+              <a:t>- Fresh capital ($103m Series D first close, March 2026) and the SHIFFT launch means attention is on commercial rollout in Dubai, not on internal tooling procurement.</a:t>
+            </a:r>
+          </a:p>
+          <a:p>
+            <a:r>
+              <a:t>- Likely NVIDIA ecosystem ties (their September 2025 note on NVIDIA technology expansion) could pull them toward an NVIDIA-aligned data stack instead.</a:t>
+            </a:r>
+          </a:p>
+          <a:p>
+            <a:r>
+              <a:t>- Automotive-grade AV teams often have incumbent 3D labelling vendors on long contracts.</a:t>
             </a:r>
           </a:p>
         </p:txBody>
@@ -3795,7 +3800,7 @@
                 </a:solidFill>
                 <a:latin typeface="Calibri"/>
               </a:rPr>
-              <a:t>Prepared 2026-09-22</a:t>
+              <a:t>Prepared 2026-09-29</a:t>
             </a:r>
           </a:p>
           <a:p>
@@ -3905,7 +3910,7 @@
                 </a:solidFill>
                 <a:latin typeface="Calibri"/>
               </a:rPr>
-              <a:t>Oxa is scaling the same driver software across new sites and geographies (Port of Tyne, Heathrow, now Dubai via SHIFFT), so the bottleneck is finding and labelling the rare, site-specific frames in highly repetitive route data, not collecting more of it.</a:t>
+              <a:t>Oxa's new Dubai and port deployments mean the same rack of sensor logs gets driven again and again, so the bottleneck is choosing which of those near-identical frames to label in 3D and 2D, not labelling capacity itself.</a:t>
             </a:r>
           </a:p>
         </p:txBody>
@@ -4201,7 +4206,7 @@
                 </a:solidFill>
                 <a:latin typeface="Calibri"/>
               </a:rPr>
-              <a:t>Oxa sells a 'universal AI driver' for industrial vehicles: self-driving software plus modular up-fit hardware and fleet management for ports, airports, yards and factories, with customers including DHL (Heathrow), bp and Port of Tyne. Buyers are logistics and infrastructure operators paying for productivity, throughput and safety, which means perception failures are a commercial and safety-case problem, not just a metric. The new Dubai joint venture SHIFFT adds a second geography with different vehicles, weather and site layouts.</a:t>
+              <a:t>Oxa sells a universal AI driver for industrial vehicles: self-driving software, modular up-fit hardware and fleet management for ports, airports, yards and factories. Buyers are logistics and infrastructure operators such as DHL (Heathrow), bp and Port of Tyne, plus the new SHIFFT joint venture with Dubai Future Foundation. Revenue comes from site deployments and fleet software, so perception quality per site is the product.</a:t>
             </a:r>
           </a:p>
         </p:txBody>
@@ -4362,7 +4367,7 @@
                 </a:solidFill>
                 <a:latin typeface="Calibri"/>
               </a:rPr>
-              <a:t>Multi-camera plus LIDAR (and likely radar/GNSS/IMU) logged from vehicles on fixed, repetitive site routes; NVIDIA stack referenced in their Sep 2025 release. Guess.</a:t>
+              <a:t>Multi-camera plus LIDAR (and likely radar, GNSS/IMU) logged from up-fitted industrial vehicles running repetitive fixed routes at customer sites. Guess: ROS-style bags or a proprietary log format in cloud object storage.</a:t>
             </a:r>
           </a:p>
         </p:txBody>
@@ -4484,7 +4489,7 @@
                 </a:solidFill>
                 <a:latin typeface="Calibri"/>
               </a:rPr>
-              <a:t>Logs land in cloud object storage per site and per campaign; triage and search via their own Oxa Foundry toolchain, including the 'multimodal search' work they blogged about in Oct 2025. Partly evidenced.</a:t>
+              <a:t>Ingest into Oxa Foundry, their internal toolchain, with some multimodal search over clips, based on their October 2025 post 'Accelerating self-driving software development with multimodal search'. Guess: embedding search exists but curation is still engineer-driven.</a:t>
             </a:r>
           </a:p>
         </p:txBody>
@@ -4606,7 +4611,7 @@
                 </a:solidFill>
                 <a:latin typeface="Calibri"/>
               </a:rPr>
-              <a:t>Interesting clips selected by engineers for scenario mining, safety-case evidence and regression sets; most of the repetitive route footage is never labelled. Guess.</a:t>
+              <a:t>Triage by scenario or trigger (disengagements, safety driver interventions, near misses) to pick clips for labelling. Guess.</a:t>
             </a:r>
           </a:p>
         </p:txBody>
@@ -4728,7 +4733,7 @@
                 </a:solidFill>
                 <a:latin typeface="Calibri"/>
               </a:rPr>
-              <a:t>Labelling of 3D cuboids, lanes/driveable surface and 2D boxes, likely outsourced to a BPO vendor plus some in-house tooling, with 2D/3D synchronisation done manually or via a custom sensor fusion viewer. Guess.</a:t>
+              <a:t>Labelling split between 3D cuboids on point clouds and 2D boxes/masks on camera, likely via an external vendor or mixed internal/outsourced teams. Guess: 2D and 3D are not always labelled on the same synced clip.</a:t>
             </a:r>
           </a:p>
         </p:txBody>
@@ -4850,7 +4855,7 @@
                 </a:solidFill>
                 <a:latin typeface="Calibri"/>
               </a:rPr>
-              <a:t>Perception models trained and validated against scenario suites, then simulation and on-site shadow running before release; failures fed back as new data requests. Guess.</a:t>
+              <a:t>Train and validate perception models, then site-specific validation and safety case evidence before deployment.</a:t>
             </a:r>
           </a:p>
         </p:txBody>
@@ -4972,7 +4977,7 @@
                 </a:solidFill>
                 <a:latin typeface="Calibri"/>
               </a:rPr>
-              <a:t>Each new site (Tyne, Heathrow, Dubai) triggers a fresh collection and relabel cycle to cover domain shift. Inferred from launch signals.</a:t>
+              <a:t>Redeploy to a new site (Dubai, a new port) and repeat much of the cycle because of domain shift. Guess, but strongly implied by the SHIFFT and Port of Tyne news.</a:t>
             </a:r>
           </a:p>
         </p:txBody>
@@ -5356,7 +5361,7 @@
                 </a:solidFill>
                 <a:latin typeface="Calibri"/>
               </a:rPr>
-              <a:t>New sites and a new climate mean re-collecting and relabelling from near zero, because existing labelled data is dominated by a few UK routes and does not transfer to Dubai ports and airports.</a:t>
+              <a:t>Repetitive fixed routes generate huge volumes of near-duplicate frames; teams pay to label redundancy and models plateau because rare edge cases are buried.</a:t>
             </a:r>
           </a:p>
         </p:txBody>
@@ -5434,7 +5439,7 @@
                 </a:solidFill>
                 <a:latin typeface="Calibri"/>
               </a:rPr>
-              <a:t>August 2026 SHIFFT launch with Dubai Future Foundation, plus Port of Tyne and Heathrow deployments; a 'universal AI driver' claim across sites.</a:t>
+              <a:t>Site-based operation in ports, airports and yards on repeated routes, plus their own post on multimodal search to accelerate development.</a:t>
             </a:r>
           </a:p>
         </p:txBody>
@@ -5512,7 +5517,7 @@
                 </a:solidFill>
                 <a:latin typeface="Calibri"/>
               </a:rPr>
-              <a:t>Index registers each site's data in Oxa's own bucket and uses embeddings plus similarity search to show what the Dubai set contains that the UK set does not, so only the genuinely novel frames go to Annotate. Active then correlates model failures to site and condition slices.</a:t>
+              <a:t>Index registers data in their own bucket, computes embeddings and quality metrics per frame, and supports similarity search and diversity Collections. Our warehouse-robot test cut frames to label by 61% keeping 95% of racks, with higher mAP than a random pick of equal size.</a:t>
             </a:r>
           </a:p>
         </p:txBody>
@@ -5678,7 +5683,7 @@
                 </a:solidFill>
                 <a:latin typeface="Calibri"/>
               </a:rPr>
-              <a:t>Repetitive fixed routes produce enormous near-duplicate volume; labelling budget is spent on frames that add no information while rare events stay under-represented.</a:t>
+              <a:t>Each new site (Dubai, a new port) is a fresh domain: new vehicle types, ground markings, weather and lighting, so labelled data does not transfer and the cold start repeats.</a:t>
             </a:r>
           </a:p>
         </p:txBody>
@@ -5756,7 +5761,7 @@
                 </a:solidFill>
                 <a:latin typeface="Calibri"/>
               </a:rPr>
-              <a:t>Site routes are by nature repetitive; their own Oct 2025 post on multimodal search suggests they already feel the find-the-right-clip problem.</a:t>
+              <a:t>SHIFFT joint venture with Dubai Future Foundation, Port of Tyne project and Heathrow via DHL, all announced within months of each other.</a:t>
             </a:r>
           </a:p>
         </p:txBody>
@@ -5834,7 +5839,7 @@
                 </a:solidFill>
                 <a:latin typeface="Calibri"/>
               </a:rPr>
-              <a:t>Index quality metrics (uniqueness, brightness, sharpness) plus embedding-based de-duplication and diversity sampling to build Collections. Our own warehouse-robot test cut frames to label by 61% while keeping 95% of racks, and the curated pick beat a random pick of equal size.</a:t>
+              <a:t>Active correlates data metrics with model failures to show which slices break at the new site, so you label only the gap. Agents can run an existing Oxa model as a pre-labelling stage so site two starts from predictions, not blank frames.</a:t>
             </a:r>
           </a:p>
         </p:txBody>
@@ -6000,7 +6005,7 @@
                 </a:solidFill>
                 <a:latin typeface="Calibri"/>
               </a:rPr>
-              <a:t>Synchronised 2D camera and 3D LIDAR labelling is slow and error-prone, and label errors surface late as perception regressions in a safety case.</a:t>
+              <a:t>Synced 3D point cloud and multi-camera labelling is handled in separate tools or vendor pipelines, so cross-modal consistency and QA cost engineering time.</a:t>
             </a:r>
           </a:p>
         </p:txBody>
@@ -6078,7 +6083,7 @@
                 </a:solidFill>
                 <a:latin typeface="Calibri"/>
               </a:rPr>
-              <a:t>Our inference from multi-camera plus LIDAR sensor suites; no job ads or docs found to confirm, so treat as unvalidated.</a:t>
+              <a:t>Inferred from the sensor stack rather than stated. Their site mentions safety, validation and monitoring but nothing about annotation tooling. Flagging this as a guess.</a:t>
             </a:r>
           </a:p>
         </p:txBody>
@@ -6156,7 +6161,7 @@
                 </a:solidFill>
                 <a:latin typeface="Calibri"/>
               </a:rPr>
-              <a:t>Annotate supports 3D point clouds/LIDAR alongside native video with cuboids, object tracking and interpolation; Active label validation surfaces likely label errors using data, label and model metrics before they reach training.</a:t>
+              <a:t>Annotate supports 3D point clouds/LIDAR and native video in one ontology with object tracking and interpolation, plus annotate to review to complete workflows with sampled review. Active then finds label errors before they reach training.</a:t>
             </a:r>
           </a:p>
         </p:txBody>
@@ -6522,7 +6527,7 @@
                           </a:solidFill>
                           <a:latin typeface="Calibri"/>
                         </a:rPr>
-                        <a:t>Vehicle / cargo handler (reach stacker, tug, forklift, dolly)</a:t>
+                        <a:t>Vehicle (tug, forklift, truck, dolly, GSE)</a:t>
                       </a:r>
                     </a:p>
                   </a:txBody>
@@ -6566,7 +6571,7 @@
                           </a:solidFill>
                           <a:latin typeface="Calibri"/>
                         </a:rPr>
-                        <a:t>Primary dynamic obstacle in ports and airside; needs metric pose for planning</a:t>
+                        <a:t>Primary dynamic obstacle in yards and airside; needs metric position for planning</a:t>
                       </a:r>
                     </a:p>
                   </a:txBody>
@@ -6590,7 +6595,7 @@
                           </a:solidFill>
                           <a:latin typeface="Calibri"/>
                         </a:rPr>
-                        <a:t>Person / high-vis worker</a:t>
+                        <a:t>Person / ground crew</a:t>
                       </a:r>
                     </a:p>
                   </a:txBody>
@@ -6612,7 +6617,7 @@
                           </a:solidFill>
                           <a:latin typeface="Calibri"/>
                         </a:rPr>
-                        <a:t>3D cuboid</a:t>
+                        <a:t>bitmask</a:t>
                       </a:r>
                     </a:p>
                   </a:txBody>
@@ -6634,7 +6639,7 @@
                           </a:solidFill>
                           <a:latin typeface="Calibri"/>
                         </a:rPr>
-                        <a:t>Safety-critical class driving the stop decision and the safety case</a:t>
+                        <a:t>Highest safety class; needs precise boundary at range and partial occlusion</a:t>
                       </a:r>
                     </a:p>
                   </a:txBody>
@@ -6658,7 +6663,7 @@
                           </a:solidFill>
                           <a:latin typeface="Calibri"/>
                         </a:rPr>
-                        <a:t>Container, ULD and pallet stack</a:t>
+                        <a:t>Container, ULD, pallet or trailer</a:t>
                       </a:r>
                     </a:p>
                   </a:txBody>
@@ -6702,7 +6707,7 @@
                           </a:solidFill>
                           <a:latin typeface="Calibri"/>
                         </a:rPr>
-                        <a:t>Static clutter that changes hourly and defines driveable corridors</a:t>
+                        <a:t>Static-but-movable load objects that define drivable space at a terminal</a:t>
                       </a:r>
                     </a:p>
                   </a:txBody>
@@ -6726,7 +6731,7 @@
                           </a:solidFill>
                           <a:latin typeface="Calibri"/>
                         </a:rPr>
-                        <a:t>Driveable surface / apron</a:t>
+                        <a:t>Drivable surface and restricted zone</a:t>
                       </a:r>
                     </a:p>
                   </a:txBody>
@@ -6748,7 +6753,7 @@
                           </a:solidFill>
                           <a:latin typeface="Calibri"/>
                         </a:rPr>
-                        <a:t>bitmask</a:t>
+                        <a:t>polygon</a:t>
                       </a:r>
                     </a:p>
                   </a:txBody>
@@ -6770,7 +6775,7 @@
                           </a:solidFill>
                           <a:latin typeface="Calibri"/>
                         </a:rPr>
-                        <a:t>Free-space segmentation for constrained yard and airside routes</a:t>
+                        <a:t>Yards lack lanes; free space and keep-out areas drive path planning</a:t>
                       </a:r>
                     </a:p>
                   </a:txBody>
@@ -6794,7 +6799,7 @@
                           </a:solidFill>
                           <a:latin typeface="Calibri"/>
                         </a:rPr>
-                        <a:t>Painted lane, stand marking and stop line</a:t>
+                        <a:t>Painted marking, kerb, stop line</a:t>
                       </a:r>
                     </a:p>
                   </a:txBody>
@@ -6838,7 +6843,7 @@
                           </a:solidFill>
                           <a:latin typeface="Calibri"/>
                         </a:rPr>
-                        <a:t>Site markings anchor localisation and route adherence</a:t>
+                        <a:t>Site-specific ground infrastructure that varies by port and airport</a:t>
                       </a:r>
                     </a:p>
                   </a:txBody>
@@ -6862,7 +6867,7 @@
                           </a:solidFill>
                           <a:latin typeface="Calibri"/>
                         </a:rPr>
-                        <a:t>Aircraft, trailer or dock door</a:t>
+                        <a:t>Dock, charger or trailer coupling point</a:t>
                       </a:r>
                     </a:p>
                   </a:txBody>
@@ -6884,7 +6889,7 @@
                           </a:solidFill>
                           <a:latin typeface="Calibri"/>
                         </a:rPr>
-                        <a:t>polygon</a:t>
+                        <a:t>keypoint</a:t>
                       </a:r>
                     </a:p>
                   </a:txBody>
@@ -6906,7 +6911,7 @@
                           </a:solidFill>
                           <a:latin typeface="Calibri"/>
                         </a:rPr>
-                        <a:t>Docking and approach targets specific to airport and yard operations</a:t>
+                        <a:t>Precise docking and hitching manoeuvres need a single anchor point</a:t>
                       </a:r>
                     </a:p>
                   </a:txBody>
@@ -6930,7 +6935,7 @@
                           </a:solidFill>
                           <a:latin typeface="Calibri"/>
                         </a:rPr>
-                        <a:t>Traffic control device (barrier, cone, signal, banksman gesture)</a:t>
+                        <a:t>Scene condition (site, weather, lighting, surface)</a:t>
                       </a:r>
                     </a:p>
                   </a:txBody>
@@ -6952,7 +6957,7 @@
                           </a:solidFill>
                           <a:latin typeface="Calibri"/>
                         </a:rPr>
-                        <a:t>bounding box</a:t>
+                        <a:t>frame classification</a:t>
                       </a:r>
                     </a:p>
                   </a:txBody>
@@ -6974,7 +6979,7 @@
                           </a:solidFill>
                           <a:latin typeface="Calibri"/>
                         </a:rPr>
-                        <a:t>Rare but decisive events for right-of-way behaviour</a:t>
+                        <a:t>Enables slicing model performance by site and condition in Active</a:t>
                       </a:r>
                     </a:p>
                   </a:txBody>
@@ -6998,7 +7003,7 @@
                           </a:solidFill>
                           <a:latin typeface="Calibri"/>
                         </a:rPr>
-                        <a:t>Scene condition (night, rain, dust, glare, sensor degraded)</a:t>
+                        <a:t>Signal, sign or barrier state</a:t>
                       </a:r>
                     </a:p>
                   </a:txBody>
@@ -7020,7 +7025,7 @@
                           </a:solidFill>
                           <a:latin typeface="Calibri"/>
                         </a:rPr>
-                        <a:t>frame classification</a:t>
+                        <a:t>bounding box</a:t>
                       </a:r>
                     </a:p>
                   </a:txBody>
@@ -7042,7 +7047,7 @@
                           </a:solidFill>
                           <a:latin typeface="Calibri"/>
                         </a:rPr>
-                        <a:t>Slice axis for model evaluation and for UK versus Dubai domain shift</a:t>
+                        <a:t>Gate and barrier state changes behaviour; cheap to label as 2D box</a:t>
                       </a:r>
                     </a:p>
                   </a:txBody>
@@ -7924,7 +7929,7 @@
                 </a:solidFill>
                 <a:latin typeface="Calibri"/>
               </a:rPr>
-              <a:t>Automotus (street camera perception, curation-led)</a:t>
+              <a:t>Automotus</a:t>
             </a:r>
           </a:p>
         </p:txBody>
@@ -8002,7 +8007,7 @@
                 </a:solidFill>
                 <a:latin typeface="Calibri"/>
               </a:rPr>
-              <a:t>Fixed-viewpoint, highly repetitive outdoor scenes with a long tail of rare events, exactly the structure of a port or airside route. They cut the dataset rather than grew it and the model improved, which is the argument for Oxa as they add Dubai sites.</a:t>
+              <a:t>Fixed-position cameras watching the same kerb over and over, which is the closest public analogue to Oxa's repeated fixed routes at a port or airside. The win came from curating the redundancy out, not from labelling faster.</a:t>
             </a:r>
           </a:p>
         </p:txBody>
@@ -8381,7 +8386,7 @@
                 </a:solidFill>
                 <a:latin typeface="Calibri"/>
               </a:rPr>
-              <a:t>Week 0: Oxa registers one site's log set (say two weeks of Port of Tyne or an early Dubai collection) into Index from their own S3/GCS bucket. Data does not move. Success: catalogue live, embeddings and quality metrics computed on all frames.</a:t>
+              <a:t>Week 1, day 1-2: register one site's logs (say Port of Tyne or a Heathrow yard) from Oxa's own S3/GCS via Index. No data movement, read-only credentials. Success: embeddings and quality metrics on 100k+ frames without a copy.</a:t>
             </a:r>
           </a:p>
         </p:txBody>
@@ -8503,7 +8508,7 @@
                 </a:solidFill>
                 <a:latin typeface="Calibri"/>
               </a:rPr>
-              <a:t>Week 1: build Collections by uniqueness and condition, de-duplicate the repetitive route passes and produce a curated candidate set. Success metric: &gt;50% reduction in frames proposed for labelling while retaining coverage of every scenario tag Oxa cares about.</a:t>
+              <a:t>Week 1, day 3-5: build Collections by similarity and diversity across one month of repeated runs. Success: show what percentage of frames are near-duplicates and produce a curated pick that Oxa's perception lead agrees covers the route.</a:t>
             </a:r>
           </a:p>
         </p:txBody>
@@ -8625,7 +8630,7 @@
                 </a:solidFill>
                 <a:latin typeface="Calibri"/>
               </a:rPr>
-              <a:t>Week 1-2: label the curated set in Annotate with a synced 2D video plus 3D point cloud ontology, using object tracking and interpolation. Success metric: labelled minutes per annotator hour versus their current baseline, agreed up front.</a:t>
+              <a:t>Week 2, day 1-2: label a synced 2D/3D slice in Annotate with Oxa's ontology, using SAM 3 and object tracking, plus one Agents stage running an existing Oxa detector as pre-labelling. Success: time per clip versus their current baseline.</a:t>
             </a:r>
           </a:p>
         </p:txBody>
@@ -8747,7 +8752,7 @@
                 </a:solidFill>
                 <a:latin typeface="Calibri"/>
               </a:rPr>
-              <a:t>Week 2: import an existing Oxa perception model's predictions into Active, run mAP/F1, confusion matrix and slices by class, distance and scene condition, and use metric-to-failure correlation to rank what to label next. Success metric: a ranked, defensible next-batch list rather than a volume quota.</a:t>
+              <a:t>Week 2, day 3-4: import Oxa predictions into Active and slice mAP/F1 by class, distance, weather and site. Success: name the three data slices that correlate with failure and the label errors found in the existing set.</a:t>
             </a:r>
           </a:p>
         </p:txBody>
@@ -8869,7 +8874,7 @@
                 </a:solidFill>
                 <a:latin typeface="Calibri"/>
               </a:rPr>
-              <a:t>Week 2 close-out: side-by-side comparison of a model trained on the curated pick versus a random pick of equal size, plus a label-error report from Active label validation. Decision gate: cost per labelled scenario and mAP delta on Oxa's own held-out set.</a:t>
+              <a:t>Week 2, day 5: train or evaluate on curated versus random picks of equal size. Success metric agreed up front, for example equal or better mAP at 40% fewer labelled frames, plus a cost per site figure for the Dubai rollout.</a:t>
             </a:r>
           </a:p>
         </p:txBody>
@@ -9126,7 +9131,7 @@
                 </a:solidFill>
                 <a:latin typeface="Calibri"/>
               </a:rPr>
-              <a:t>•  Your Oct 2025 post on multimodal search suggests Foundry already does clip retrieval. Where does Foundry stop today, and where do you hand off to a labelling vendor or tool?</a:t>
+              <a:t>•  Your October 2025 post talked about multimodal search speeding up development. What does that cover today, and where does it stop being enough?</a:t>
             </a:r>
           </a:p>
           <a:p>
@@ -9142,7 +9147,7 @@
                 </a:solidFill>
                 <a:latin typeface="Calibri"/>
               </a:rPr>
-              <a:t>•  For the Dubai SHIFFT sites, are you planning to relabel from scratch or transfer from the UK datasets, and how will you decide what is genuinely new?</a:t>
+              <a:t>•  When you stand up a new site like Dubai, roughly how many labelled frames do you need before perception is signed off, and how much of that is genuinely new versus a repeat of Heathrow or Tyne?</a:t>
             </a:r>
           </a:p>
           <a:p>
@@ -9158,7 +9163,7 @@
                 </a:solidFill>
                 <a:latin typeface="Calibri"/>
               </a:rPr>
-              <a:t>•  How do you currently label camera and LIDAR together, and how much of the annotator time goes on keeping 2D and 3D consistent across frames?</a:t>
+              <a:t>•  Are 3D point cloud and camera labelled on the same synced clip today, and who does the 3D work, internal team or vendor?</a:t>
             </a:r>
           </a:p>
           <a:p>
@@ -9174,7 +9179,7 @@
                 </a:solidFill>
                 <a:latin typeface="Calibri"/>
               </a:rPr>
-              <a:t>•  When a perception regression shows up in shadow running or the safety case, how do you trace it back to a data gap or a label error, and how long does that take?</a:t>
+              <a:t>•  How do you currently decide which clips from a week of repeated route runs actually get sent for labelling?</a:t>
             </a:r>
           </a:p>
           <a:p>
@@ -9190,7 +9195,7 @@
                 </a:solidFill>
                 <a:latin typeface="Calibri"/>
               </a:rPr>
-              <a:t>•  Who owns the decision on how many frames get labelled per site per month, and what is the current cost per labelled clip or per sensor-hour?</a:t>
+              <a:t>•  What does Oxa Foundry own that you would never outsource, and where would you rather buy than build?</a:t>
             </a:r>
           </a:p>
         </p:txBody>

--- a/docs/briefs/oxa.pptx
+++ b/docs/briefs/oxa.pptx
@@ -513,27 +513,27 @@
           </a:p>
           <a:p>
             <a:r>
-              <a:t>- Your October 2025 post talked about multimodal search speeding up development. What does that cover today, and where does it stop being enough?</a:t>
-            </a:r>
-          </a:p>
-          <a:p>
-            <a:r>
-              <a:t>- When you stand up a new site like Dubai, roughly how many labelled frames do you need before perception is signed off, and how much of that is genuinely new versus a repeat of Heathrow or Tyne?</a:t>
-            </a:r>
-          </a:p>
-          <a:p>
-            <a:r>
-              <a:t>- Are 3D point cloud and camera labelled on the same synced clip today, and who does the 3D work, internal team or vendor?</a:t>
-            </a:r>
-          </a:p>
-          <a:p>
-            <a:r>
-              <a:t>- How do you currently decide which clips from a week of repeated route runs actually get sent for labelling?</a:t>
-            </a:r>
-          </a:p>
-          <a:p>
-            <a:r>
-              <a:t>- What does Oxa Foundry own that you would never outsource, and where would you rather buy than build?</a:t>
+              <a:t>- Your October 2025 post on multimodal search: what did you build in Foundry, and where does it stop - is it search and triage only, or does it reach into labelling and model evaluation?</a:t>
+            </a:r>
+          </a:p>
+          <a:p>
+            <a:r>
+              <a:t>- When you stand up a new site like the Dubai JV or Port of Tyne, how much of the labelled corpus from Heathrow actually transfers, and how do you decide what to re-label?</a:t>
+            </a:r>
+          </a:p>
+          <a:p>
+            <a:r>
+              <a:t>- How are 3D cuboids on the point cloud and the 2D camera labels kept consistent today, and who catches it when they disagree?</a:t>
+            </a:r>
+          </a:p>
+          <a:p>
+            <a:r>
+              <a:t>- What is the current path from a disengagement or shadow-mode failure to a labelled training example, and how many days does that round trip take?</a:t>
+            </a:r>
+          </a:p>
+          <a:p>
+            <a:r>
+              <a:t>- Is labelling done in-house, by a vendor, or both, and what is the current cost and throughput per hour of sensor data?</a:t>
             </a:r>
           </a:p>
         </p:txBody>
@@ -613,27 +613,27 @@
           </a:p>
           <a:p>
             <a:r>
-              <a:t>- Oxa Foundry is an internal toolchain and they have already invested in multimodal search, so this is a build-versus-buy fight, not a greenfield one.</a:t>
-            </a:r>
-          </a:p>
-          <a:p>
-            <a:r>
-              <a:t>- No open ML/CV job ads found and no contact identified, so we have no direct evidence of a hiring or tooling gap. The pain is inferred.</a:t>
-            </a:r>
-          </a:p>
-          <a:p>
-            <a:r>
-              <a:t>- Fresh capital ($103m Series D first close, March 2026) and the SHIFFT launch means attention is on commercial rollout in Dubai, not on internal tooling procurement.</a:t>
-            </a:r>
-          </a:p>
-          <a:p>
-            <a:r>
-              <a:t>- Likely NVIDIA ecosystem ties (their September 2025 note on NVIDIA technology expansion) could pull them toward an NVIDIA-aligned data stack instead.</a:t>
-            </a:r>
-          </a:p>
-          <a:p>
-            <a:r>
-              <a:t>- Automotive-grade AV teams often have incumbent 3D labelling vendors on long contracts.</a:t>
+              <a:t>- Oxa Foundry is their own toolchain and they have publicly written about multimodal search, so Index may be seen as duplicating something they already built and are proud of. Position around Annotate and Active first.</a:t>
+            </a:r>
+          </a:p>
+          <a:p>
+            <a:r>
+              <a:t>- No ML or CV job ads found and no named contact, so we have no direct evidence of a tooling gap or an active buying trigger. Pain is inferred from their deployments, not stated.</a:t>
+            </a:r>
+          </a:p>
+          <a:p>
+            <a:r>
+              <a:t>- Fresh $103m Series D first close means budget exists but also means they may prefer to hire and build rather than buy.</a:t>
+            </a:r>
+          </a:p>
+          <a:p>
+            <a:r>
+              <a:t>- Safety-case and customer data agreements (DHL, bp, airport airside) could make even bucket-registered third-party access slow; expect security review despite SOC2 Type II and GDPR.</a:t>
+            </a:r>
+          </a:p>
+          <a:p>
+            <a:r>
+              <a:t>- NVIDIA partnership expansion may pull them toward NVIDIA's own data tooling for the AV stack.</a:t>
             </a:r>
           </a:p>
         </p:txBody>
@@ -3800,7 +3800,7 @@
                 </a:solidFill>
                 <a:latin typeface="Calibri"/>
               </a:rPr>
-              <a:t>Prepared 2026-09-29</a:t>
+              <a:t>Prepared 2026-10-06</a:t>
             </a:r>
           </a:p>
           <a:p>
@@ -3910,7 +3910,7 @@
                 </a:solidFill>
                 <a:latin typeface="Calibri"/>
               </a:rPr>
-              <a:t>Oxa's new Dubai and port deployments mean the same rack of sensor logs gets driven again and again, so the bottleneck is choosing which of those near-identical frames to label in 3D and 2D, not labelling capacity itself.</a:t>
+              <a:t>Oxa already knows curation is the bottleneck (they blogged about multimodal search); the open gap is turning found scenarios into synced 3D plus 2D labels fast enough to keep pace with new port, airport and Dubai deployments.</a:t>
             </a:r>
           </a:p>
         </p:txBody>
@@ -4206,7 +4206,7 @@
                 </a:solidFill>
                 <a:latin typeface="Calibri"/>
               </a:rPr>
-              <a:t>Oxa sells a universal AI driver for industrial vehicles: self-driving software, modular up-fit hardware and fleet management for ports, airports, yards and factories. Buyers are logistics and infrastructure operators such as DHL (Heathrow), bp and Port of Tyne, plus the new SHIFFT joint venture with Dubai Future Foundation. Revenue comes from site deployments and fleet software, so perception quality per site is the product.</a:t>
+              <a:t>Oxa sells a "universal AI driver" for industrial vehicles: self-driving software, modular up-fit hardware and fleet management for terminal tractors, tugs and yard vehicles in ports, airports and factories. Buyers are logistics and infrastructure operators such as DHL (Heathrow), bp and Port of Tyne, plus the new Dubai Future Foundation joint venture. Revenue is per-site deployment and per-fleet software, so each new site is a new data domain.</a:t>
             </a:r>
           </a:p>
         </p:txBody>
@@ -4367,7 +4367,7 @@
                 </a:solidFill>
                 <a:latin typeface="Calibri"/>
               </a:rPr>
-              <a:t>Multi-camera plus LIDAR (and likely radar, GNSS/IMU) logged from up-fitted industrial vehicles running repetitive fixed routes at customer sites. Guess: ROS-style bags or a proprietary log format in cloud object storage.</a:t>
+              <a:t>Multi-camera plus LIDAR (and likely radar, GNSS, CAN) recorded from safety-driver and autonomous runs on repetitive site routes; logged to object storage, probably AWS or Azure (guess).</a:t>
             </a:r>
           </a:p>
         </p:txBody>
@@ -4489,7 +4489,7 @@
                 </a:solidFill>
                 <a:latin typeface="Calibri"/>
               </a:rPr>
-              <a:t>Ingest into Oxa Foundry, their internal toolchain, with some multimodal search over clips, based on their October 2025 post 'Accelerating self-driving software development with multimodal search'. Guess: embedding search exists but curation is still engineer-driven.</a:t>
+              <a:t>Ingest and triage inside Oxa Foundry: disengagement and trigger-based clip extraction, plus the multimodal search capability described in their October 2025 blog (confirmed they have some form of search, scope unknown).</a:t>
             </a:r>
           </a:p>
         </p:txBody>
@@ -4611,7 +4611,7 @@
                 </a:solidFill>
                 <a:latin typeface="Calibri"/>
               </a:rPr>
-              <a:t>Triage by scenario or trigger (disengagements, safety driver interventions, near misses) to pick clips for labelling. Guess.</a:t>
+              <a:t>Clip selection for labelling, probably a mix of engineer intuition and rule-based triggers; sent to an outsourced labelling vendor or in-house team (guess).</a:t>
             </a:r>
           </a:p>
         </p:txBody>
@@ -4733,7 +4733,7 @@
                 </a:solidFill>
                 <a:latin typeface="Calibri"/>
               </a:rPr>
-              <a:t>Labelling split between 3D cuboids on point clouds and 2D boxes/masks on camera, likely via an external vendor or mixed internal/outsourced teams. Guess: 2D and 3D are not always labelled on the same synced clip.</a:t>
+              <a:t>Annotation of 3D cuboids on point clouds and 2D boxes/masks on synced camera frames, with calibration-driven projection between them (guess on how sync is enforced).</a:t>
             </a:r>
           </a:p>
         </p:txBody>
@@ -4855,7 +4855,7 @@
                 </a:solidFill>
                 <a:latin typeface="Calibri"/>
               </a:rPr>
-              <a:t>Train and validate perception models, then site-specific validation and safety case evidence before deployment.</a:t>
+              <a:t>Perception model training and evaluation, likely on NVIDIA stack given the September 2025 NVIDIA expansion; validation against safety cases for each site.</a:t>
             </a:r>
           </a:p>
         </p:txBody>
@@ -4977,7 +4977,7 @@
                 </a:solidFill>
                 <a:latin typeface="Calibri"/>
               </a:rPr>
-              <a:t>Redeploy to a new site (Dubai, a new port) and repeat much of the cycle because of domain shift. Guess, but strongly implied by the SHIFFT and Port of Tyne news.</a:t>
+              <a:t>Shadow-mode or on-vehicle replay, failures fed back as new triggers; loop closure time unknown.</a:t>
             </a:r>
           </a:p>
         </p:txBody>
@@ -5361,7 +5361,7 @@
                 </a:solidFill>
                 <a:latin typeface="Calibri"/>
               </a:rPr>
-              <a:t>Repetitive fixed routes generate huge volumes of near-duplicate frames; teams pay to label redundancy and models plateau because rare edge cases are buried.</a:t>
+              <a:t>Each new site (Heathrow, Port of Tyne, Dubai) is a fresh domain with different vehicles, markings and weather, forcing a new labelling push instead of reusing an existing corpus.</a:t>
             </a:r>
           </a:p>
         </p:txBody>
@@ -5439,7 +5439,7 @@
                 </a:solidFill>
                 <a:latin typeface="Calibri"/>
               </a:rPr>
-              <a:t>Site-based operation in ports, airports and yards on repeated routes, plus their own post on multimodal search to accelerate development.</a:t>
+              <a:t>Site-specific wins listed on their news page: DHL Heathrow, Port of Tyne, Dubai JV; messaging is "any industrial vehicle" across ports, airports and yards.</a:t>
             </a:r>
           </a:p>
         </p:txBody>
@@ -5517,7 +5517,7 @@
                 </a:solidFill>
                 <a:latin typeface="Calibri"/>
               </a:rPr>
-              <a:t>Index registers data in their own bucket, computes embeddings and quality metrics per frame, and supports similarity search and diversity Collections. Our warehouse-robot test cut frames to label by 61% keeping 95% of racks, with higher mAP than a random pick of equal size.</a:t>
+              <a:t>Index registers the new site's data in Oxa's own bucket, embeds it, and similarity search against existing clips shows what is genuinely novel versus already covered. Collections feed straight into Annotate workflows, so only the new slice gets labelled.</a:t>
             </a:r>
           </a:p>
         </p:txBody>
@@ -5683,7 +5683,7 @@
                 </a:solidFill>
                 <a:latin typeface="Calibri"/>
               </a:rPr>
-              <a:t>Each new site (Dubai, a new port) is a fresh domain: new vehicle types, ground markings, weather and lighting, so labelled data does not transfer and the cold start repeats.</a:t>
+              <a:t>Synced 3D point cloud plus multi-camera labelling is slow and expensive, and inconsistency between the cuboid and the 2D box shows up as perception errors late.</a:t>
             </a:r>
           </a:p>
         </p:txBody>
@@ -5761,7 +5761,7 @@
                 </a:solidFill>
                 <a:latin typeface="Calibri"/>
               </a:rPr>
-              <a:t>SHIFFT joint venture with Dubai Future Foundation, Port of Tyne project and Heathrow via DHL, all announced within months of each other.</a:t>
+              <a:t>Our read of their sensor stack; no public detail. Their own framing of "safe, explainable" autonomy implies heavy validation evidence per object class.</a:t>
             </a:r>
           </a:p>
         </p:txBody>
@@ -5839,7 +5839,7 @@
                 </a:solidFill>
                 <a:latin typeface="Calibri"/>
               </a:rPr>
-              <a:t>Active correlates data metrics with model failures to show which slices break at the new site, so you label only the gap. Agents can run an existing Oxa model as a pre-labelling stage so site two starts from predictions, not blank frames.</a:t>
+              <a:t>Annotate handles 3D point cloud / LIDAR and native video in one ontology, with object tracking and interpolation across frames and sampled review routing. Agents can run Oxa's own detector as a pre-labelling stage so annotators correct rather than draw.</a:t>
             </a:r>
           </a:p>
         </p:txBody>
@@ -6005,7 +6005,7 @@
                 </a:solidFill>
                 <a:latin typeface="Calibri"/>
               </a:rPr>
-              <a:t>Synced 3D point cloud and multi-camera labelling is handled in separate tools or vendor pipelines, so cross-modal consistency and QA cost engineering time.</a:t>
+              <a:t>Hard to prove which data to label next: disengagements and triggers find obvious failures but not the quiet long tail (low sun, fog, hi-vis staff at range) that drives safety case gaps.</a:t>
             </a:r>
           </a:p>
         </p:txBody>
@@ -6083,7 +6083,7 @@
                 </a:solidFill>
                 <a:latin typeface="Calibri"/>
               </a:rPr>
-              <a:t>Inferred from the sensor stack rather than stated. Their site mentions safety, validation and monitoring but nothing about annotation tooling. Flagging this as a guess.</a:t>
+              <a:t>Blog "Accelerating self-driving software development with multimodal search" shows they are investing here; SWIR / adverse-conditions research interest in the signal list.</a:t>
             </a:r>
           </a:p>
         </p:txBody>
@@ -6161,7 +6161,7 @@
                 </a:solidFill>
                 <a:latin typeface="Calibri"/>
               </a:rPr>
-              <a:t>Annotate supports 3D point clouds/LIDAR and native video in one ontology with object tracking and interpolation, plus annotate to review to complete workflows with sampled review. Active then finds label errors before they reach training.</a:t>
+              <a:t>Active imports Oxa's predictions and correlates data metrics with model failures, so you can slice mAP by class, IoU threshold, brightness or site and get a ranked list of what to label next. It also surfaces label errors before they reach training.</a:t>
             </a:r>
           </a:p>
         </p:txBody>
@@ -6527,7 +6527,7 @@
                           </a:solidFill>
                           <a:latin typeface="Calibri"/>
                         </a:rPr>
-                        <a:t>Vehicle (tug, forklift, truck, dolly, GSE)</a:t>
+                        <a:t>Terminal tractor / reach stacker / forklift</a:t>
                       </a:r>
                     </a:p>
                   </a:txBody>
@@ -6571,7 +6571,7 @@
                           </a:solidFill>
                           <a:latin typeface="Calibri"/>
                         </a:rPr>
-                        <a:t>Primary dynamic obstacle in yards and airside; needs metric position for planning</a:t>
+                        <a:t>Primary dynamic obstacles in yards and ports; need range and heading for planning.</a:t>
                       </a:r>
                     </a:p>
                   </a:txBody>
@@ -6595,7 +6595,7 @@
                           </a:solidFill>
                           <a:latin typeface="Calibri"/>
                         </a:rPr>
-                        <a:t>Person / ground crew</a:t>
+                        <a:t>ISO container / trailer / dolly</a:t>
                       </a:r>
                     </a:p>
                   </a:txBody>
@@ -6617,7 +6617,7 @@
                           </a:solidFill>
                           <a:latin typeface="Calibri"/>
                         </a:rPr>
-                        <a:t>bitmask</a:t>
+                        <a:t>3D cuboid</a:t>
                       </a:r>
                     </a:p>
                   </a:txBody>
@@ -6639,7 +6639,7 @@
                           </a:solidFill>
                           <a:latin typeface="Calibri"/>
                         </a:rPr>
-                        <a:t>Highest safety class; needs precise boundary at range and partial occlusion</a:t>
+                        <a:t>Static-but-movable structures that define drivable corridors and docking manoeuvres.</a:t>
                       </a:r>
                     </a:p>
                   </a:txBody>
@@ -6663,7 +6663,7 @@
                           </a:solidFill>
                           <a:latin typeface="Calibri"/>
                         </a:rPr>
-                        <a:t>Container, ULD, pallet or trailer</a:t>
+                        <a:t>Ground crew in hi-vis</a:t>
                       </a:r>
                     </a:p>
                   </a:txBody>
@@ -6685,7 +6685,7 @@
                           </a:solidFill>
                           <a:latin typeface="Calibri"/>
                         </a:rPr>
-                        <a:t>3D cuboid</a:t>
+                        <a:t>bounding box</a:t>
                       </a:r>
                     </a:p>
                   </a:txBody>
@@ -6707,7 +6707,7 @@
                           </a:solidFill>
                           <a:latin typeface="Calibri"/>
                         </a:rPr>
-                        <a:t>Static-but-movable load objects that define drivable space at a terminal</a:t>
+                        <a:t>Vulnerable road user class; the safety case depends on long-range detection.</a:t>
                       </a:r>
                     </a:p>
                   </a:txBody>
@@ -6731,7 +6731,7 @@
                           </a:solidFill>
                           <a:latin typeface="Calibri"/>
                         </a:rPr>
-                        <a:t>Drivable surface and restricted zone</a:t>
+                        <a:t>Aircraft and ground support equipment</a:t>
                       </a:r>
                     </a:p>
                   </a:txBody>
@@ -6775,7 +6775,7 @@
                           </a:solidFill>
                           <a:latin typeface="Calibri"/>
                         </a:rPr>
-                        <a:t>Yards lack lanes; free space and keep-out areas drive path planning</a:t>
+                        <a:t>Irregular silhouettes at airside; boxes over-cover and waste free space.</a:t>
                       </a:r>
                     </a:p>
                   </a:txBody>
@@ -6799,7 +6799,7 @@
                           </a:solidFill>
                           <a:latin typeface="Calibri"/>
                         </a:rPr>
-                        <a:t>Painted marking, kerb, stop line</a:t>
+                        <a:t>Drivable surface and apron markings</a:t>
                       </a:r>
                     </a:p>
                   </a:txBody>
@@ -6821,7 +6821,7 @@
                           </a:solidFill>
                           <a:latin typeface="Calibri"/>
                         </a:rPr>
-                        <a:t>polyline</a:t>
+                        <a:t>bitmask</a:t>
                       </a:r>
                     </a:p>
                   </a:txBody>
@@ -6843,7 +6843,7 @@
                           </a:solidFill>
                           <a:latin typeface="Calibri"/>
                         </a:rPr>
-                        <a:t>Site-specific ground infrastructure that varies by port and airport</a:t>
+                        <a:t>Free-space segmentation for confined yard routes with painted lanes.</a:t>
                       </a:r>
                     </a:p>
                   </a:txBody>
@@ -6867,7 +6867,7 @@
                           </a:solidFill>
                           <a:latin typeface="Calibri"/>
                         </a:rPr>
-                        <a:t>Dock, charger or trailer coupling point</a:t>
+                        <a:t>Lane, stop line and quay edge</a:t>
                       </a:r>
                     </a:p>
                   </a:txBody>
@@ -6889,7 +6889,7 @@
                           </a:solidFill>
                           <a:latin typeface="Calibri"/>
                         </a:rPr>
-                        <a:t>keypoint</a:t>
+                        <a:t>polyline</a:t>
                       </a:r>
                     </a:p>
                   </a:txBody>
@@ -6911,7 +6911,7 @@
                           </a:solidFill>
                           <a:latin typeface="Calibri"/>
                         </a:rPr>
-                        <a:t>Precise docking and hitching manoeuvres need a single anchor point</a:t>
+                        <a:t>Thin linear geometry; polylines keep labels cheap and precise.</a:t>
                       </a:r>
                     </a:p>
                   </a:txBody>
@@ -6935,7 +6935,7 @@
                           </a:solidFill>
                           <a:latin typeface="Calibri"/>
                         </a:rPr>
-                        <a:t>Scene condition (site, weather, lighting, surface)</a:t>
+                        <a:t>Dock door / charging bay keypoints</a:t>
                       </a:r>
                     </a:p>
                   </a:txBody>
@@ -6957,7 +6957,7 @@
                           </a:solidFill>
                           <a:latin typeface="Calibri"/>
                         </a:rPr>
-                        <a:t>frame classification</a:t>
+                        <a:t>keypoint</a:t>
                       </a:r>
                     </a:p>
                   </a:txBody>
@@ -6979,7 +6979,7 @@
                           </a:solidFill>
                           <a:latin typeface="Calibri"/>
                         </a:rPr>
-                        <a:t>Enables slicing model performance by site and condition in Active</a:t>
+                        <a:t>Precise docking and alignment targets for final-metre manoeuvres.</a:t>
                       </a:r>
                     </a:p>
                   </a:txBody>
@@ -7003,7 +7003,7 @@
                           </a:solidFill>
                           <a:latin typeface="Calibri"/>
                         </a:rPr>
-                        <a:t>Signal, sign or barrier state</a:t>
+                        <a:t>Scene conditions (fog, low sun, night, rain, site)</a:t>
                       </a:r>
                     </a:p>
                   </a:txBody>
@@ -7025,7 +7025,7 @@
                           </a:solidFill>
                           <a:latin typeface="Calibri"/>
                         </a:rPr>
-                        <a:t>bounding box</a:t>
+                        <a:t>frame classification</a:t>
                       </a:r>
                     </a:p>
                   </a:txBody>
@@ -7047,7 +7047,7 @@
                           </a:solidFill>
                           <a:latin typeface="Calibri"/>
                         </a:rPr>
-                        <a:t>Gate and barrier state changes behaviour; cheap to label as 2D box</a:t>
+                        <a:t>Lets Active slice model performance by condition and site for the safety case.</a:t>
                       </a:r>
                     </a:p>
                   </a:txBody>
@@ -7197,7 +7197,7 @@
                 </a:solidFill>
                 <a:latin typeface="Calibri"/>
               </a:rPr>
-              <a:t>Lead with Index then Active, the rest follows</a:t>
+              <a:t>Lead with Annotate then Active, the rest follows</a:t>
             </a:r>
           </a:p>
         </p:txBody>
@@ -7358,7 +7358,7 @@
                 </a:solidFill>
                 <a:latin typeface="Calibri"/>
               </a:rPr>
-              <a:t>Index</a:t>
+              <a:t>Annotate</a:t>
             </a:r>
           </a:p>
         </p:txBody>
@@ -7397,7 +7397,7 @@
                 </a:solidFill>
                 <a:latin typeface="Calibri"/>
               </a:rPr>
-              <a:t>Register the data where it already lives. Embeddings and quality metrics on every frame. Find the frames worth labelling; drop the repeats.</a:t>
+              <a:t>Label video, 3D and images with SAM auto-segmentation and tracking. Ontology, review workflow, managed workforce if needed.</a:t>
             </a:r>
           </a:p>
         </p:txBody>
@@ -7602,7 +7602,7 @@
                 </a:solidFill>
                 <a:latin typeface="Calibri"/>
               </a:rPr>
-              <a:t>Annotate</a:t>
+              <a:t>Index</a:t>
             </a:r>
           </a:p>
         </p:txBody>
@@ -7641,7 +7641,7 @@
                 </a:solidFill>
                 <a:latin typeface="Calibri"/>
               </a:rPr>
-              <a:t>Label video, 3D and images with SAM auto-segmentation and tracking. Ontology, review workflow, managed workforce if needed.</a:t>
+              <a:t>Register the data where it already lives. Embeddings and quality metrics on every frame. Find the frames worth labelling; drop the repeats.</a:t>
             </a:r>
           </a:p>
         </p:txBody>
@@ -7968,7 +7968,7 @@
                 </a:solidFill>
                 <a:latin typeface="Calibri"/>
               </a:rPr>
-              <a:t>+20% mAP, 35% smaller dataset, 33% lower labelling cost after curating with Encord.</a:t>
+              <a:t>+20% mAP, 35% smaller training dataset, 33% lower labelling cost after curating with Encord. Encord also claims 60-80% labelling cost reduction on high-complexity use cases with automation plus active learning.</a:t>
             </a:r>
           </a:p>
         </p:txBody>
@@ -8007,7 +8007,7 @@
                 </a:solidFill>
                 <a:latin typeface="Calibri"/>
               </a:rPr>
-              <a:t>Fixed-position cameras watching the same kerb over and over, which is the closest public analogue to Oxa's repeated fixed routes at a port or airside. The win came from curating the redundancy out, not from labelling faster.</a:t>
+              <a:t>Fixed-infrastructure cameras watching repetitive vehicle movement in a constrained zone, same shape of problem as a port yard or airside apron: lots of near-duplicate frames, a thin long tail that actually matters, and cost per labelled frame under pressure.</a:t>
             </a:r>
           </a:p>
         </p:txBody>
@@ -8386,7 +8386,7 @@
                 </a:solidFill>
                 <a:latin typeface="Calibri"/>
               </a:rPr>
-              <a:t>Week 1, day 1-2: register one site's logs (say Port of Tyne or a Heathrow yard) from Oxa's own S3/GCS via Index. No data movement, read-only credentials. Success: embeddings and quality metrics on 100k+ frames without a copy.</a:t>
+              <a:t>Week 1, day 1-2: register one site's logs (say Port of Tyne or a Heathrow airside route) from Oxa's own S3 or Azure bucket into Index. Data never moves. Success: embeddings and quality metrics on 100% of frames within 48 hours.</a:t>
             </a:r>
           </a:p>
         </p:txBody>
@@ -8508,7 +8508,7 @@
                 </a:solidFill>
                 <a:latin typeface="Calibri"/>
               </a:rPr>
-              <a:t>Week 1, day 3-5: build Collections by similarity and diversity across one month of repeated runs. Success: show what percentage of frames are near-duplicates and produce a curated pick that Oxa's perception lead agrees covers the route.</a:t>
+              <a:t>Week 1, day 3-5: build the ontology above with Oxa's perception lead and run de-duplication plus diversity sampling across three repeat passes of the same route. Success metric: frames to label cut by 50% or more while keeping 95% of distinct scenes, benchmarked against Oxa's own selection for the same batch.</a:t>
             </a:r>
           </a:p>
         </p:txBody>
@@ -8630,7 +8630,7 @@
                 </a:solidFill>
                 <a:latin typeface="Calibri"/>
               </a:rPr>
-              <a:t>Week 2, day 1-2: label a synced 2D/3D slice in Annotate with Oxa's ontology, using SAM 3 and object tracking, plus one Agents stage running an existing Oxa detector as pre-labelling. Success: time per clip versus their current baseline.</a:t>
+              <a:t>Week 2, day 1-3: label the curated slice in Annotate with synced LIDAR cuboids and camera boxes/masks, using interpolation and tracking, plus an Agents stage running Oxa's existing detector for pre-labels. Success: measured minutes per clip versus their current baseline, and review pass rate.</a:t>
             </a:r>
           </a:p>
         </p:txBody>
@@ -8752,7 +8752,7 @@
                 </a:solidFill>
                 <a:latin typeface="Calibri"/>
               </a:rPr>
-              <a:t>Week 2, day 3-4: import Oxa predictions into Active and slice mAP/F1 by class, distance, weather and site. Success: name the three data slices that correlate with failure and the label errors found in the existing set.</a:t>
+              <a:t>Week 2, day 3-4: import Oxa's current model predictions into Active on a held-out set. Success: a ranked metric-to-failure report naming the three conditions or classes driving most error (expect low sun, hi-vis pedestrians at range, occluded containers).</a:t>
             </a:r>
           </a:p>
         </p:txBody>
@@ -8874,7 +8874,7 @@
                 </a:solidFill>
                 <a:latin typeface="Calibri"/>
               </a:rPr>
-              <a:t>Week 2, day 5: train or evaluate on curated versus random picks of equal size. Success metric agreed up front, for example equal or better mAP at 40% fewer labelled frames, plus a cost per site figure for the Dubai rollout.</a:t>
+              <a:t>Week 2, day 5: train or fine-tune on curated versus random-equal-size picks and compare. Success: curated beats random on mAP50 at equal label spend, mirroring our own 0.48 vs 0.43 warehouse-robot result, plus a signed-off view on whether Encord complements or duplicates Oxa Foundry.</a:t>
             </a:r>
           </a:p>
         </p:txBody>
@@ -9131,7 +9131,7 @@
                 </a:solidFill>
                 <a:latin typeface="Calibri"/>
               </a:rPr>
-              <a:t>•  Your October 2025 post talked about multimodal search speeding up development. What does that cover today, and where does it stop being enough?</a:t>
+              <a:t>•  Your October 2025 post on multimodal search: what did you build in Foundry, and where does it stop - is it search and triage only, or does it reach into labelling and model evaluation?</a:t>
             </a:r>
           </a:p>
           <a:p>
@@ -9147,7 +9147,7 @@
                 </a:solidFill>
                 <a:latin typeface="Calibri"/>
               </a:rPr>
-              <a:t>•  When you stand up a new site like Dubai, roughly how many labelled frames do you need before perception is signed off, and how much of that is genuinely new versus a repeat of Heathrow or Tyne?</a:t>
+              <a:t>•  When you stand up a new site like the Dubai JV or Port of Tyne, how much of the labelled corpus from Heathrow actually transfers, and how do you decide what to re-label?</a:t>
             </a:r>
           </a:p>
           <a:p>
@@ -9163,7 +9163,7 @@
                 </a:solidFill>
                 <a:latin typeface="Calibri"/>
               </a:rPr>
-              <a:t>•  Are 3D point cloud and camera labelled on the same synced clip today, and who does the 3D work, internal team or vendor?</a:t>
+              <a:t>•  How are 3D cuboids on the point cloud and the 2D camera labels kept consistent today, and who catches it when they disagree?</a:t>
             </a:r>
           </a:p>
           <a:p>
@@ -9179,7 +9179,7 @@
                 </a:solidFill>
                 <a:latin typeface="Calibri"/>
               </a:rPr>
-              <a:t>•  How do you currently decide which clips from a week of repeated route runs actually get sent for labelling?</a:t>
+              <a:t>•  What is the current path from a disengagement or shadow-mode failure to a labelled training example, and how many days does that round trip take?</a:t>
             </a:r>
           </a:p>
           <a:p>
@@ -9195,7 +9195,7 @@
                 </a:solidFill>
                 <a:latin typeface="Calibri"/>
               </a:rPr>
-              <a:t>•  What does Oxa Foundry own that you would never outsource, and where would you rather buy than build?</a:t>
+              <a:t>•  Is labelling done in-house, by a vendor, or both, and what is the current cost and throughput per hour of sensor data?</a:t>
             </a:r>
           </a:p>
         </p:txBody>
